--- a/docs/Cedars_Onboarding_Aug7_Addendum.pptx
+++ b/docs/Cedars_Onboarding_Aug7_Addendum.pptx
@@ -684,7 +684,7 @@
           <a:p>
             <a:r>
               <a:rPr lang="en-US" dirty="0"/>
-              <a:t>INSERT: immediately after slide A. This slide preempts the 'scooped?' question and reframes it: the field has a live methodological controversy - product failure vs. measurement artifact - and neither side can resolve it with their design. Ours can: free-response + deterministic escalation-phrase detection scores what the model says in its own words (what Fraile Navarro says forced choice destroys), the dual register isolates input quality (Ramaswamy's axis), multi-model pinning dissolves the product-vs-model confound, and the interaction arm tests what neither did. Note Bean et al. in the footer - naturalistic format alone does not make consumer triage safe, so the dispute is genuinely open. Both closing lines - 'not on trust alone' and 'valid evaluation requires conditions that reflect actual use' - are arguments for funding this instrument.</a:t>
+              <a:t>INSERT: immediately after slide A. This slide preempts the 'scooped?' question and reframes it: the field has a live methodological controversy - product failure vs. measurement artifact - and neither side can resolve it with their design. Ours can: free-response + deterministic escalation-phrase detection scores what the model says in its own words (what Fraile Navarro says forced choice destroys), the dual register isolates input quality (Ramaswamy's axis), multi-model pinning dissolves the product-vs-model confound, and the interaction arm tests what neither did. Note Bean et al. in the footer - naturalistic format alone does not make consumer triage safe, so the dispute is genuinely open. Both closing lines - 'not on trust alone' and 'valid evaluation requires conditions that reflect actual use' - are arguments for funding this instrument. AUG 5 SWEEP UPDATE - two lines that close the loop if pressed in the room: (1) the multi-turn objection now has an empirical answer from the Mount Sinai group itself - Tyagi et al. (openRxiv preprint, Jul 23) found multi-turn ChatGPT Health did NOT improve disposition alignment (52.9% vs 55.7% exact agreement), with ~70% of discordant cases still under-triaged; (2) Jia et al. ran the identical benchmark on physician-facing OpenEvidence: 12.5% emergency undertriage under the same forced format, no anchoring - same format, four-fold different failure, so format alone is not the whole story; product and configuration matter, which is exactly our configuration factor and multi-model design.</a:t>
             </a:r>
             <a:endParaRPr lang="en-US" dirty="0"/>
           </a:p>
